--- a/livro_ia_educacao/saida/pptx/Cap32_slides.pptx
+++ b/livro_ia_educacao/saida/pptx/Cap32_slides.pptx
@@ -6196,11 +6196,11 @@
         <p:spPr>
           <a:xfrm>
             <a:off x="548640" y="1417320"/>
-            <a:ext cx="11064240" cy="762000"/>
+            <a:ext cx="11064240" cy="682752"/>
           </a:xfrm>
           <a:prstGeom prst="roundRect">
             <a:avLst>
-              <a:gd name="adj" fmla="val 14400"/>
+              <a:gd name="adj" fmla="val 16071"/>
             </a:avLst>
           </a:prstGeom>
           <a:solidFill>
@@ -6227,7 +6227,7 @@
         <p:spPr>
           <a:xfrm>
             <a:off x="731520" y="1417320"/>
-            <a:ext cx="548640" cy="762000"/>
+            <a:ext cx="548640" cy="682752"/>
           </a:xfrm>
           <a:prstGeom prst="rect">
             <a:avLst/>
@@ -6263,7 +6263,7 @@
         <p:spPr>
           <a:xfrm>
             <a:off x="1463040" y="1417320"/>
-            <a:ext cx="9966960" cy="762000"/>
+            <a:ext cx="9966960" cy="682752"/>
           </a:xfrm>
           <a:prstGeom prst="rect">
             <a:avLst/>
@@ -6298,12 +6298,12 @@
         </p:nvSpPr>
         <p:spPr>
           <a:xfrm>
-            <a:off x="548640" y="2289048"/>
-            <a:ext cx="11064240" cy="762000"/>
+            <a:off x="548640" y="2209800"/>
+            <a:ext cx="11064240" cy="682752"/>
           </a:xfrm>
           <a:prstGeom prst="roundRect">
             <a:avLst>
-              <a:gd name="adj" fmla="val 14400"/>
+              <a:gd name="adj" fmla="val 16071"/>
             </a:avLst>
           </a:prstGeom>
           <a:solidFill>
@@ -6329,8 +6329,8 @@
         </p:nvSpPr>
         <p:spPr>
           <a:xfrm>
-            <a:off x="731520" y="2289048"/>
-            <a:ext cx="548640" cy="762000"/>
+            <a:off x="731520" y="2209800"/>
+            <a:ext cx="548640" cy="682752"/>
           </a:xfrm>
           <a:prstGeom prst="rect">
             <a:avLst/>
@@ -6365,8 +6365,8 @@
         </p:nvSpPr>
         <p:spPr>
           <a:xfrm>
-            <a:off x="1463040" y="2289048"/>
-            <a:ext cx="9966960" cy="762000"/>
+            <a:off x="1463040" y="2209800"/>
+            <a:ext cx="9966960" cy="682752"/>
           </a:xfrm>
           <a:prstGeom prst="rect">
             <a:avLst/>
@@ -6401,12 +6401,12 @@
         </p:nvSpPr>
         <p:spPr>
           <a:xfrm>
-            <a:off x="548640" y="3160776"/>
-            <a:ext cx="11064240" cy="762000"/>
+            <a:off x="548640" y="3002280"/>
+            <a:ext cx="11064240" cy="682752"/>
           </a:xfrm>
           <a:prstGeom prst="roundRect">
             <a:avLst>
-              <a:gd name="adj" fmla="val 14400"/>
+              <a:gd name="adj" fmla="val 16071"/>
             </a:avLst>
           </a:prstGeom>
           <a:solidFill>
@@ -6432,8 +6432,8 @@
         </p:nvSpPr>
         <p:spPr>
           <a:xfrm>
-            <a:off x="731520" y="3160776"/>
-            <a:ext cx="548640" cy="762000"/>
+            <a:off x="731520" y="3002280"/>
+            <a:ext cx="548640" cy="682752"/>
           </a:xfrm>
           <a:prstGeom prst="rect">
             <a:avLst/>
@@ -6468,8 +6468,8 @@
         </p:nvSpPr>
         <p:spPr>
           <a:xfrm>
-            <a:off x="1463040" y="3160776"/>
-            <a:ext cx="9966960" cy="762000"/>
+            <a:off x="1463040" y="3002280"/>
+            <a:ext cx="9966960" cy="682752"/>
           </a:xfrm>
           <a:prstGeom prst="rect">
             <a:avLst/>
@@ -6504,12 +6504,12 @@
         </p:nvSpPr>
         <p:spPr>
           <a:xfrm>
-            <a:off x="548640" y="4032504"/>
-            <a:ext cx="11064240" cy="762000"/>
+            <a:off x="548640" y="3794760"/>
+            <a:ext cx="11064240" cy="682752"/>
           </a:xfrm>
           <a:prstGeom prst="roundRect">
             <a:avLst>
-              <a:gd name="adj" fmla="val 14400"/>
+              <a:gd name="adj" fmla="val 16071"/>
             </a:avLst>
           </a:prstGeom>
           <a:solidFill>
@@ -6535,8 +6535,8 @@
         </p:nvSpPr>
         <p:spPr>
           <a:xfrm>
-            <a:off x="731520" y="4032504"/>
-            <a:ext cx="548640" cy="762000"/>
+            <a:off x="731520" y="3794760"/>
+            <a:ext cx="548640" cy="682752"/>
           </a:xfrm>
           <a:prstGeom prst="rect">
             <a:avLst/>
@@ -6571,8 +6571,8 @@
         </p:nvSpPr>
         <p:spPr>
           <a:xfrm>
-            <a:off x="1463040" y="4032504"/>
-            <a:ext cx="9966960" cy="762000"/>
+            <a:off x="1463040" y="3794760"/>
+            <a:ext cx="9966960" cy="682752"/>
           </a:xfrm>
           <a:prstGeom prst="rect">
             <a:avLst/>
@@ -6607,12 +6607,12 @@
         </p:nvSpPr>
         <p:spPr>
           <a:xfrm>
-            <a:off x="548640" y="4904232"/>
-            <a:ext cx="11064240" cy="762000"/>
+            <a:off x="548640" y="4587240"/>
+            <a:ext cx="11064240" cy="682752"/>
           </a:xfrm>
           <a:prstGeom prst="roundRect">
             <a:avLst>
-              <a:gd name="adj" fmla="val 14400"/>
+              <a:gd name="adj" fmla="val 16071"/>
             </a:avLst>
           </a:prstGeom>
           <a:solidFill>
@@ -6638,8 +6638,8 @@
         </p:nvSpPr>
         <p:spPr>
           <a:xfrm>
-            <a:off x="731520" y="4904232"/>
-            <a:ext cx="548640" cy="762000"/>
+            <a:off x="731520" y="4587240"/>
+            <a:ext cx="548640" cy="682752"/>
           </a:xfrm>
           <a:prstGeom prst="rect">
             <a:avLst/>
@@ -6674,8 +6674,8 @@
         </p:nvSpPr>
         <p:spPr>
           <a:xfrm>
-            <a:off x="1463040" y="4904232"/>
-            <a:ext cx="9966960" cy="762000"/>
+            <a:off x="1463040" y="4587240"/>
+            <a:ext cx="9966960" cy="682752"/>
           </a:xfrm>
           <a:prstGeom prst="rect">
             <a:avLst/>
@@ -6710,12 +6710,12 @@
         </p:nvSpPr>
         <p:spPr>
           <a:xfrm>
-            <a:off x="548640" y="5775960"/>
-            <a:ext cx="11064240" cy="762000"/>
+            <a:off x="548640" y="5379720"/>
+            <a:ext cx="11064240" cy="682752"/>
           </a:xfrm>
           <a:prstGeom prst="roundRect">
             <a:avLst>
-              <a:gd name="adj" fmla="val 14400"/>
+              <a:gd name="adj" fmla="val 16071"/>
             </a:avLst>
           </a:prstGeom>
           <a:solidFill>
@@ -6741,8 +6741,8 @@
         </p:nvSpPr>
         <p:spPr>
           <a:xfrm>
-            <a:off x="731520" y="5775960"/>
-            <a:ext cx="548640" cy="762000"/>
+            <a:off x="731520" y="5379720"/>
+            <a:ext cx="548640" cy="682752"/>
           </a:xfrm>
           <a:prstGeom prst="rect">
             <a:avLst/>
@@ -6777,8 +6777,8 @@
         </p:nvSpPr>
         <p:spPr>
           <a:xfrm>
-            <a:off x="1463040" y="5775960"/>
-            <a:ext cx="9966960" cy="762000"/>
+            <a:off x="1463040" y="5379720"/>
+            <a:ext cx="9966960" cy="682752"/>
           </a:xfrm>
           <a:prstGeom prst="rect">
             <a:avLst/>
